--- a/docs/promo/dsh-composer-ux-onepager.pptx
+++ b/docs/promo/dsh-composer-ux-onepager.pptx
@@ -4073,52 +4073,30 @@
           </a:p>
         </p:txBody>
       </p:sp>
-      <p:sp>
-        <p:nvSpPr>
-          <p:cNvPr id="27" name="Rounded Rectangle 26"/>
-          <p:cNvSpPr/>
+      <p:pic>
+        <p:nvPicPr>
+          <p:cNvPr id="27" name="Picture 26" descr="screenshot.png"/>
+          <p:cNvPicPr>
+            <a:picLocks noChangeAspect="1"/>
+          </p:cNvPicPr>
           <p:nvPr/>
-        </p:nvSpPr>
+        </p:nvPicPr>
+        <p:blipFill>
+          <a:blip r:embed="rId2"/>
+          <a:stretch>
+            <a:fillRect/>
+          </a:stretch>
+        </p:blipFill>
         <p:spPr>
           <a:xfrm>
             <a:off x="7699248" y="658368"/>
-            <a:ext cx="3840480" cy="5815584"/>
-          </a:xfrm>
-          <a:prstGeom prst="roundRect">
-            <a:avLst>
-              <a:gd name="adj" fmla="val 4000"/>
-            </a:avLst>
+            <a:ext cx="3840480" cy="4718304"/>
+          </a:xfrm>
+          <a:prstGeom prst="rect">
+            <a:avLst/>
           </a:prstGeom>
-          <a:solidFill>
-            <a:srgbClr val="F6F7F9"/>
-          </a:solidFill>
-          <a:ln>
-            <a:noFill/>
-          </a:ln>
-          <a:effectLst/>
-        </p:spPr>
-        <p:style>
-          <a:lnRef idx="1">
-            <a:schemeClr val="accent1"/>
-          </a:lnRef>
-          <a:fillRef idx="3">
-            <a:schemeClr val="accent1"/>
-          </a:fillRef>
-          <a:effectRef idx="2">
-            <a:schemeClr val="accent1"/>
-          </a:effectRef>
-          <a:fontRef idx="minor">
-            <a:schemeClr val="lt1"/>
-          </a:fontRef>
-        </p:style>
-        <p:txBody>
-          <a:bodyPr rtlCol="0" anchor="ctr"/>
-          <a:lstStyle/>
-          <a:p>
-            <a:pPr algn="ctr"/>
-          </a:p>
-        </p:txBody>
-      </p:sp>
+        </p:spPr>
+      </p:pic>
       <p:sp>
         <p:nvSpPr>
           <p:cNvPr id="28" name="TextBox 27"/>
@@ -4127,8 +4105,8 @@
         </p:nvSpPr>
         <p:spPr>
           <a:xfrm>
-            <a:off x="7973568" y="3035808"/>
-            <a:ext cx="3291840" cy="1097280"/>
+            <a:off x="7699248" y="6419088"/>
+            <a:ext cx="3840480" cy="274320"/>
           </a:xfrm>
           <a:prstGeom prst="rect">
             <a:avLst/>
@@ -4141,21 +4119,15 @@
           </a:bodyPr>
           <a:lstStyle/>
           <a:p>
-            <a:pPr algn="ctr">
-              <a:lnSpc>
-                <a:spcPct val="130000"/>
-              </a:lnSpc>
-            </a:pPr>
-            <a:r>
-              <a:rPr sz="1100" b="0">
+            <a:pPr algn="ctr"/>
+            <a:r>
+              <a:rPr sz="1000" b="0">
                 <a:solidFill>
                   <a:srgbClr val="6B7280"/>
                 </a:solidFill>
                 <a:latin typeface="Microsoft YaHei"/>
               </a:rPr>
-              <a:t>（截图占位）
-把实机截图另存为 docs/promo/screenshot.png
-再跑一次本脚本即可替换</a:t>
+              <a:t>实机截图</a:t>
             </a:r>
           </a:p>
         </p:txBody>
